--- a/documents/260904_revocation_sharding.pptx
+++ b/documents/260904_revocation_sharding.pptx
@@ -3181,7 +3181,7 @@
           <a:lstStyle/>
           <a:p>
             <a:r>
-              <a:t>PairCT Mode 2 폐기 구조 설계 검토 · 2026-09-04 (2026-09-05 개정)</a:t>
+              <a:t>PairCT Mode 2 폐기 구조 · 2026-09-04 설계, 2026-09-06 구현·전환 완료</a:t>
             </a:r>
           </a:p>
         </p:txBody>
@@ -3628,7 +3628,7 @@
                       </a:pPr>
                       <a:r>
                         <a:rPr sz="1200"/>
-                        <a:t>약 546 ms</a:t>
+                        <a:t>510.3 ms</a:t>
                       </a:r>
                     </a:p>
                   </a:txBody>
@@ -3644,7 +3644,7 @@
                       </a:pPr>
                       <a:r>
                         <a:rPr sz="1200"/>
-                        <a:t>환산 (미실측)</a:t>
+                        <a:t>실측</a:t>
                       </a:r>
                     </a:p>
                   </a:txBody>
@@ -3694,7 +3694,7 @@
                       </a:pPr>
                       <a:r>
                         <a:rPr sz="1200"/>
-                        <a:t>+약 12,000 (keccak 22회 + calldata)</a:t>
+                        <a:t>330,079  (+53,370, +19.3%)</a:t>
                       </a:r>
                     </a:p>
                   </a:txBody>
@@ -3710,7 +3710,7 @@
                       </a:pPr>
                       <a:r>
                         <a:rPr sz="1200"/>
-                        <a:t>추정</a:t>
+                        <a:t>실측</a:t>
                       </a:r>
                     </a:p>
                   </a:txBody>
@@ -3895,6 +3895,24 @@
             <a:r>
               <a:rPr b="1" sz="1200"/>
               <a:t>레벨당 243, 고정 오버헤드 1,788로 분해된다. 상위 22단을 Poseidon에서 keccak으로 옮긴 만큼이 그대로 이득이다.</a:t>
+            </a:r>
+          </a:p>
+          <a:p>
+            <a:pPr>
+              <a:defRPr sz="1200"/>
+            </a:pPr>
+            <a:r>
+              <a:rPr b="1" sz="1200"/>
+              <a:t>가스가 추정(+12,000)을 4배 넘었다. 상위 경로 keccak과 calldata만 세고, Groth16 verifier가 public signal마다 치르는 비용(6-&gt;9개, ecMul 3회 약 18k)을 빼먹었다.</a:t>
+            </a:r>
+          </a:p>
+          <a:p>
+            <a:pPr>
+              <a:defRPr sz="1200"/>
+            </a:pPr>
+            <a:r>
+              <a:rPr b="0" sz="1200"/>
+              <a:t>증명 시간은 세 회로를 한 실행에서 순차로 돌린 통합 벤치 기준이다(데모 스택 정지). 로그인 1회분 합은 912.7 ms.</a:t>
             </a:r>
           </a:p>
         </p:txBody>
@@ -5547,14 +5565,14 @@
             <a:pPr lvl="1"/>
             <a:r>
               <a:rPr b="1"/>
-              <a:t>증명 시간 546ms는 constraint 비로 환산한 값이다. 실측하려면 새 zkey와 샤드를 아는 witness 생성기가 필요하다</a:t>
+              <a:t>증명 시간(510.3 ms)과 가스(330,079)도 이제 실측이다 — zkey를 만들고 진짜 증명으로 execute를 통과시켰다</a:t>
             </a:r>
           </a:p>
           <a:p>
             <a:pPr lvl="1"/>
             <a:r>
               <a:rPr b="0"/>
-              <a:t>가스 +12,000과 온체인 Poseidon 100만 gas는 추정이다 — 후자는 poseidon_gencontract를 배포해 재봐야 한다</a:t>
+              <a:t>추정으로 남은 것은 온체인 Poseidon 100만 gas 하나다 — 이 설계는 keccak만 쓰므로 직접 영향은 없다</a:t>
             </a:r>
           </a:p>
           <a:p>
@@ -5635,7 +5653,7 @@
           <a:lstStyle/>
           <a:p>
             <a:r>
-              <a:t>다음 단계</a:t>
+              <a:t>진행 상황과 남은 것</a:t>
             </a:r>
           </a:p>
         </p:txBody>
@@ -5658,77 +5676,91 @@
             <a:pPr/>
             <a:r>
               <a:rPr b="1"/>
-              <a:t>1. constraint 실측 — 완료 (2026-09-04~05)</a:t>
+              <a:t>완료 (2026-09-04 ~ 09-06)</a:t>
             </a:r>
           </a:p>
           <a:p>
             <a:pPr lvl="1"/>
             <a:r>
               <a:rPr b="0"/>
-              <a:t>3,732 / 4,218 / 13,905 확정. results/mode2_sharded_circuit_constraints_20260904.csv</a:t>
+              <a:t>설계 문서, 회로(pi_pk_i_v3), 라이브러리(imt_v3), 컨트랙트(RegistryV3/WalletV3), IdP·지갑 배선</a:t>
+            </a:r>
+          </a:p>
+          <a:p>
+            <a:pPr lvl="1"/>
+            <a:r>
+              <a:rPr b="0"/>
+              <a:t>zkey 생성 → 진짜 증명으로 execute 통과 → 실운영 스택 전환까지 마쳤다</a:t>
+            </a:r>
+          </a:p>
+          <a:p>
+            <a:pPr lvl="1"/>
+            <a:r>
+              <a:rPr b="1"/>
+              <a:t>실측 확정: constraint 13,905 · 증명 510.3 ms · 가스 330,079</a:t>
+            </a:r>
+          </a:p>
+          <a:p>
+            <a:pPr lvl="1"/>
+            <a:r>
+              <a:rPr b="0"/>
+              <a:t>테스트 unit+circuit 16 / chain 3 / contract 31 / live 16 전부 통과</a:t>
             </a:r>
           </a:p>
           <a:p>
             <a:pPr/>
             <a:r>
               <a:rPr b="1"/>
-              <a:t>2. 설계 문서 작성 (docs/superpowers/specs/)</a:t>
+              <a:t>논문 (final47에 반영 완료)</a:t>
             </a:r>
           </a:p>
           <a:p>
             <a:pPr lvl="1"/>
             <a:r>
               <a:rPr b="0"/>
-              <a:t>2축 세션 샤딩, 블록 단위 grace, 소트니스 조건 4개, 샤드별 epoch 동기화 프로토콜, 갱신 정당성 증명</a:t>
+              <a:t>폐기 절(IV-G)과 Property 9 신설, Table 1에 Revocation 열과 BAAR 행</a:t>
+            </a:r>
+          </a:p>
+          <a:p>
+            <a:pPr lvl="1"/>
+            <a:r>
+              <a:rPr b="1"/>
+              <a:t>정정: "새 신뢰 주체 없음"은 거짓이 됐다 — 온체인 게시자가 상시 역할이다</a:t>
+            </a:r>
+          </a:p>
+          <a:p>
+            <a:pPr lvl="1"/>
+            <a:r>
+              <a:rPr b="0"/>
+              <a:t>Property 5를 off-chain transcript로 한정 (계정 샤드 인덱스 누출)</a:t>
             </a:r>
           </a:p>
           <a:p>
             <a:pPr/>
             <a:r>
               <a:rPr b="1"/>
-              <a:t>3. 현재 설계를 논문에 먼저 반영</a:t>
+              <a:t>남은 것</a:t>
             </a:r>
           </a:p>
           <a:p>
             <a:pPr lvl="1"/>
             <a:r>
-              <a:rPr b="1"/>
-              <a:t>초안(final46)에 폐기 절·Property·Table 1 열이 통째로 없다</a:t>
+              <a:rPr b="0"/>
+              <a:t>v2 경로 정리(회로·IdP 트리·옛 컨트랙트)는 안정화 후</a:t>
             </a:r>
           </a:p>
           <a:p>
             <a:pPr lvl="1"/>
             <a:r>
               <a:rPr b="0"/>
-              <a:t>이 샤딩 설계는 그 다음이다 — 지금 것부터 써야 비교 기준이 생긴다</a:t>
-            </a:r>
-          </a:p>
-          <a:p>
-            <a:pPr/>
-            <a:r>
-              <a:rPr b="1"/>
-              <a:t>4. 남은 실측</a:t>
+              <a:t>갱신 정당성 증명(12번)은 별도 설계 — 롤백은 막지만 폐기 누락은 원리상 못 막는다</a:t>
             </a:r>
           </a:p>
           <a:p>
             <a:pPr lvl="1"/>
             <a:r>
               <a:rPr b="0"/>
-              <a:t>새 zkey + 샤드를 아는 witness 생성기로 증명 시간, poseidon_gencontract로 온체인 해시 가스</a:t>
-            </a:r>
-          </a:p>
-          <a:p>
-            <a:pPr/>
-            <a:r>
-              <a:rPr b="1"/>
-              <a:t>5. 구현</a:t>
-            </a:r>
-          </a:p>
-          <a:p>
-            <a:pPr lvl="1"/>
-            <a:r>
-              <a:rPr b="0"/>
-              <a:t>lib/ 신규 모듈 + 단위 테스트 → IdP/지갑 배선 → zkey·재배포</a:t>
+              <a:t>온체인 Poseidon 가스만 추정으로 남았다(이 설계는 keccak만 쓴다)</a:t>
             </a:r>
           </a:p>
         </p:txBody>
@@ -6666,7 +6698,7 @@
                       </a:pPr>
                       <a:r>
                         <a:rPr sz="1200"/>
-                        <a:t>약 546 ms</a:t>
+                        <a:t>510.3 ms (실측)</a:t>
                       </a:r>
                     </a:p>
                   </a:txBody>

--- a/documents/260904_revocation_sharding.pptx
+++ b/documents/260904_revocation_sharding.pptx
@@ -4524,7 +4524,7 @@
             <a:pPr lvl="1"/>
             <a:r>
               <a:rPr b="1"/>
-              <a:t>삽입마다 root 재계산: Poseidon 약 40회. EVM에 precompile이 없어 폐기 1건당 100만 gas 안팎이다</a:t>
+              <a:t>삽입마다 root 재계산: Poseidon 약 40회. EVM에 precompile이 없어 실측 기준 폐기 1건당 약 216만 gas다</a:t>
             </a:r>
           </a:p>
           <a:p>
@@ -5571,8 +5571,8 @@
           <a:p>
             <a:pPr lvl="1"/>
             <a:r>
-              <a:rPr b="0"/>
-              <a:t>추정으로 남은 것은 온체인 Poseidon 100만 gas 하나다 — 이 설계는 keccak만 쓰므로 직접 영향은 없다</a:t>
+              <a:rPr b="1"/>
+              <a:t>추정 항목이 없다. 온체인 Poseidon도 실측했다 — 해시 1회 54,138 gas로 keccak(4,771)의 11.3배</a:t>
             </a:r>
           </a:p>
           <a:p>
@@ -5760,7 +5760,7 @@
             <a:pPr lvl="1"/>
             <a:r>
               <a:rPr b="0"/>
-              <a:t>온체인 Poseidon 가스만 추정으로 남았다(이 설계는 keccak만 쓴다)</a:t>
+              <a:t>온체인 Poseidon도 실측 완료 — keccak의 11.3배라 상위 트리를 밖으로 뺀 판단이 수치로 뒷받침된다</a:t>
             </a:r>
           </a:p>
         </p:txBody>
